--- a/slides/4-1_preop_visit_asa_ps/4-1_preop_visit_asa_ps.pptx
+++ b/slides/4-1_preop_visit_asa_ps/4-1_preop_visit_asa_ps.pptx
@@ -2651,7 +2651,7 @@
         <p:spPr>
           <a:xfrm>
             <a:off x="502920" y="1810512"/>
-            <a:ext cx="11155680" cy="3813048"/>
+            <a:ext cx="11155680" cy="4005072"/>
           </a:xfrm>
           <a:prstGeom prst="rect">
             <a:avLst/>
@@ -2665,7 +2665,7 @@
           <a:p>
             <a:pPr algn="l" marL="406400" indent="-406400">
               <a:spcAft>
-                <a:spcPts val="2200"/>
+                <a:spcPts val="2500"/>
               </a:spcAft>
               <a:buSzPct val="100000"/>
               <a:buChar char="•"/>
@@ -2686,7 +2686,7 @@
           <a:p>
             <a:pPr algn="l" marL="406400" indent="-406400">
               <a:spcAft>
-                <a:spcPts val="2200"/>
+                <a:spcPts val="2500"/>
               </a:spcAft>
               <a:buSzPct val="100000"/>
               <a:buChar char="•"/>
@@ -2707,7 +2707,7 @@
           <a:p>
             <a:pPr algn="l" marL="406400" indent="-406400">
               <a:spcAft>
-                <a:spcPts val="2200"/>
+                <a:spcPts val="2500"/>
               </a:spcAft>
               <a:buSzPct val="100000"/>
               <a:buChar char="•"/>
@@ -2728,7 +2728,7 @@
           <a:p>
             <a:pPr algn="l" marL="406400" indent="-406400">
               <a:spcAft>
-                <a:spcPts val="2200"/>
+                <a:spcPts val="2500"/>
               </a:spcAft>
               <a:buSzPct val="100000"/>
               <a:buChar char="•"/>
@@ -2749,7 +2749,7 @@
           <a:p>
             <a:pPr algn="l" marL="406400" indent="-406400">
               <a:spcAft>
-                <a:spcPts val="2200"/>
+                <a:spcPts val="2500"/>
               </a:spcAft>
               <a:buSzPct val="100000"/>
               <a:buChar char="•"/>
@@ -3793,8 +3793,8 @@
         </p:nvSpPr>
         <p:spPr>
           <a:xfrm>
-            <a:off x="502920" y="2615184"/>
-            <a:ext cx="1920240" cy="914400"/>
+            <a:off x="658368" y="2615184"/>
+            <a:ext cx="1883664" cy="914400"/>
           </a:xfrm>
           <a:prstGeom prst="roundRect">
             <a:avLst>
@@ -3837,7 +3837,7 @@
         <p:spPr>
           <a:xfrm>
             <a:off x="502920" y="3803904"/>
-            <a:ext cx="1920240" cy="1362456"/>
+            <a:ext cx="2194560" cy="1362456"/>
           </a:xfrm>
           <a:prstGeom prst="rect">
             <a:avLst/>
@@ -3884,7 +3884,7 @@
                 <a:ea typeface="メイリオ" pitchFamily="34" charset="-122"/>
                 <a:cs typeface="メイリオ" pitchFamily="34" charset="-120"/>
               </a:rPr>
-              <a:t>既往、検査、</a:t>
+              <a:t>既往、</a:t>
             </a:r>
             <a:endParaRPr lang="ja-JP" sz="2200" dirty="0"/>
           </a:p>
@@ -3904,7 +3904,7 @@
                 <a:ea typeface="メイリオ" pitchFamily="34" charset="-122"/>
                 <a:cs typeface="メイリオ" pitchFamily="34" charset="-120"/>
               </a:rPr>
-              <a:t>内服</a:t>
+              <a:t>検査、内服</a:t>
             </a:r>
             <a:endParaRPr lang="ja-JP" sz="2200" dirty="0"/>
           </a:p>
@@ -3918,8 +3918,8 @@
         </p:nvSpPr>
         <p:spPr>
           <a:xfrm>
-            <a:off x="2487168" y="3072384"/>
-            <a:ext cx="149047" cy="0"/>
+            <a:off x="2633472" y="3072384"/>
+            <a:ext cx="88697" cy="0"/>
           </a:xfrm>
           <a:prstGeom prst="line">
             <a:avLst/>
@@ -3941,8 +3941,8 @@
         </p:nvSpPr>
         <p:spPr>
           <a:xfrm>
-            <a:off x="2617927" y="2962656"/>
-            <a:ext cx="137160" cy="219456"/>
+            <a:off x="2704795" y="2971800"/>
+            <a:ext cx="109728" cy="201168"/>
           </a:xfrm>
           <a:custGeom>
             <a:avLst/>
@@ -3951,12 +3951,12 @@
             <a:cxnLst/>
             <a:rect l="l" t="t" r="r" b="b"/>
             <a:pathLst>
-              <a:path w="137160" h="219456">
+              <a:path w="109728" h="201168">
                 <a:moveTo>
-                  <a:pt x="137160" y="109728"/>
+                  <a:pt x="109728" y="100584"/>
                 </a:moveTo>
                 <a:lnTo>
-                  <a:pt x="0" y="219456"/>
+                  <a:pt x="0" y="201168"/>
                 </a:lnTo>
                 <a:lnTo>
                   <a:pt x="0" y="0"/>
@@ -3984,8 +3984,8 @@
         </p:nvSpPr>
         <p:spPr>
           <a:xfrm>
-            <a:off x="2819095" y="2615184"/>
-            <a:ext cx="1920240" cy="914400"/>
+            <a:off x="2905963" y="2615184"/>
+            <a:ext cx="1883664" cy="914400"/>
           </a:xfrm>
           <a:prstGeom prst="roundRect">
             <a:avLst>
@@ -4027,8 +4027,8 @@
         </p:nvSpPr>
         <p:spPr>
           <a:xfrm>
-            <a:off x="2819095" y="3803904"/>
-            <a:ext cx="1920240" cy="896112"/>
+            <a:off x="2750515" y="3803904"/>
+            <a:ext cx="2194560" cy="896112"/>
           </a:xfrm>
           <a:prstGeom prst="rect">
             <a:avLst/>
@@ -4089,8 +4089,8 @@
         </p:nvSpPr>
         <p:spPr>
           <a:xfrm>
-            <a:off x="4803343" y="3072384"/>
-            <a:ext cx="148133" cy="0"/>
+            <a:off x="4881067" y="3072384"/>
+            <a:ext cx="89611" cy="0"/>
           </a:xfrm>
           <a:prstGeom prst="line">
             <a:avLst/>
@@ -4112,8 +4112,8 @@
         </p:nvSpPr>
         <p:spPr>
           <a:xfrm>
-            <a:off x="4933188" y="2962656"/>
-            <a:ext cx="138074" cy="219456"/>
+            <a:off x="4952390" y="2971800"/>
+            <a:ext cx="109728" cy="201168"/>
           </a:xfrm>
           <a:custGeom>
             <a:avLst/>
@@ -4122,12 +4122,12 @@
             <a:cxnLst/>
             <a:rect l="l" t="t" r="r" b="b"/>
             <a:pathLst>
-              <a:path w="138074" h="219456">
+              <a:path w="109728" h="201168">
                 <a:moveTo>
-                  <a:pt x="138074" y="109728"/>
+                  <a:pt x="109728" y="100584"/>
                 </a:moveTo>
                 <a:lnTo>
-                  <a:pt x="0" y="219456"/>
+                  <a:pt x="0" y="201168"/>
                 </a:lnTo>
                 <a:lnTo>
                   <a:pt x="0" y="0"/>
@@ -4155,8 +4155,8 @@
         </p:nvSpPr>
         <p:spPr>
           <a:xfrm>
-            <a:off x="5134356" y="2615184"/>
-            <a:ext cx="1920240" cy="914400"/>
+            <a:off x="5152644" y="2615184"/>
+            <a:ext cx="1883664" cy="914400"/>
           </a:xfrm>
           <a:prstGeom prst="roundRect">
             <a:avLst>
@@ -4198,8 +4198,8 @@
         </p:nvSpPr>
         <p:spPr>
           <a:xfrm>
-            <a:off x="5134356" y="3803904"/>
-            <a:ext cx="1920240" cy="896112"/>
+            <a:off x="4997196" y="3803904"/>
+            <a:ext cx="2194560" cy="896112"/>
           </a:xfrm>
           <a:prstGeom prst="rect">
             <a:avLst/>
@@ -4260,8 +4260,8 @@
         </p:nvSpPr>
         <p:spPr>
           <a:xfrm>
-            <a:off x="7118604" y="3072384"/>
-            <a:ext cx="149047" cy="0"/>
+            <a:off x="7127748" y="3072384"/>
+            <a:ext cx="89611" cy="0"/>
           </a:xfrm>
           <a:prstGeom prst="line">
             <a:avLst/>
@@ -4283,8 +4283,8 @@
         </p:nvSpPr>
         <p:spPr>
           <a:xfrm>
-            <a:off x="7249363" y="2962656"/>
-            <a:ext cx="137160" cy="219456"/>
+            <a:off x="7199071" y="2971800"/>
+            <a:ext cx="109728" cy="201168"/>
           </a:xfrm>
           <a:custGeom>
             <a:avLst/>
@@ -4293,12 +4293,12 @@
             <a:cxnLst/>
             <a:rect l="l" t="t" r="r" b="b"/>
             <a:pathLst>
-              <a:path w="137160" h="219456">
+              <a:path w="109728" h="201168">
                 <a:moveTo>
-                  <a:pt x="137160" y="109728"/>
+                  <a:pt x="109728" y="100584"/>
                 </a:moveTo>
                 <a:lnTo>
-                  <a:pt x="0" y="219456"/>
+                  <a:pt x="0" y="201168"/>
                 </a:lnTo>
                 <a:lnTo>
                   <a:pt x="0" y="0"/>
@@ -4326,8 +4326,8 @@
         </p:nvSpPr>
         <p:spPr>
           <a:xfrm>
-            <a:off x="7450531" y="2615184"/>
-            <a:ext cx="1920240" cy="914400"/>
+            <a:off x="7400239" y="2615184"/>
+            <a:ext cx="1883664" cy="914400"/>
           </a:xfrm>
           <a:prstGeom prst="roundRect">
             <a:avLst>
@@ -4369,8 +4369,8 @@
         </p:nvSpPr>
         <p:spPr>
           <a:xfrm>
-            <a:off x="7450531" y="3803904"/>
-            <a:ext cx="1920240" cy="896112"/>
+            <a:off x="7244791" y="3803904"/>
+            <a:ext cx="2194560" cy="420624"/>
           </a:xfrm>
           <a:prstGeom prst="rect">
             <a:avLst/>
@@ -4397,27 +4397,7 @@
                 <a:ea typeface="メイリオ" pitchFamily="34" charset="-122"/>
                 <a:cs typeface="メイリオ" pitchFamily="34" charset="-120"/>
               </a:rPr>
-              <a:t>必要な</a:t>
-            </a:r>
-            <a:endParaRPr lang="ja-JP" sz="2200" dirty="0"/>
-          </a:p>
-          <a:p>
-            <a:pPr algn="ctr" indent="0" marL="0">
-              <a:spcAft>
-                <a:spcPts val="400"/>
-              </a:spcAft>
-              <a:buNone/>
-            </a:pPr>
-            <a:r>
-              <a:rPr lang="ja-JP" altLang="en-US" sz="2200" dirty="0">
-                <a:solidFill>
-                  <a:srgbClr val="262626"/>
-                </a:solidFill>
-                <a:latin typeface="メイリオ" pitchFamily="34" charset="0"/>
-                <a:ea typeface="メイリオ" pitchFamily="34" charset="-122"/>
-                <a:cs typeface="メイリオ" pitchFamily="34" charset="-120"/>
-              </a:rPr>
-              <a:t>ものだけ</a:t>
+              <a:t>必要なものだけ</a:t>
             </a:r>
             <a:endParaRPr lang="ja-JP" sz="2200" dirty="0"/>
           </a:p>
@@ -4431,8 +4411,8 @@
         </p:nvSpPr>
         <p:spPr>
           <a:xfrm>
-            <a:off x="9434779" y="3072384"/>
-            <a:ext cx="148133" cy="0"/>
+            <a:off x="9375343" y="3072384"/>
+            <a:ext cx="89611" cy="0"/>
           </a:xfrm>
           <a:prstGeom prst="line">
             <a:avLst/>
@@ -4454,8 +4434,8 @@
         </p:nvSpPr>
         <p:spPr>
           <a:xfrm>
-            <a:off x="9564624" y="2962656"/>
-            <a:ext cx="137160" cy="219456"/>
+            <a:off x="9446666" y="2971800"/>
+            <a:ext cx="109728" cy="201168"/>
           </a:xfrm>
           <a:custGeom>
             <a:avLst/>
@@ -4464,12 +4444,12 @@
             <a:cxnLst/>
             <a:rect l="l" t="t" r="r" b="b"/>
             <a:pathLst>
-              <a:path w="137160" h="219456">
+              <a:path w="109728" h="201168">
                 <a:moveTo>
-                  <a:pt x="137160" y="109728"/>
+                  <a:pt x="109728" y="100584"/>
                 </a:moveTo>
                 <a:lnTo>
-                  <a:pt x="0" y="219456"/>
+                  <a:pt x="0" y="201168"/>
                 </a:lnTo>
                 <a:lnTo>
                   <a:pt x="0" y="0"/>
@@ -4497,8 +4477,8 @@
         </p:nvSpPr>
         <p:spPr>
           <a:xfrm>
-            <a:off x="9765792" y="2615184"/>
-            <a:ext cx="1920240" cy="914400"/>
+            <a:off x="9646920" y="2615184"/>
+            <a:ext cx="1883664" cy="914400"/>
           </a:xfrm>
           <a:prstGeom prst="roundRect">
             <a:avLst>
@@ -4540,8 +4520,8 @@
         </p:nvSpPr>
         <p:spPr>
           <a:xfrm>
-            <a:off x="9765792" y="3803904"/>
-            <a:ext cx="1920240" cy="1362456"/>
+            <a:off x="9491472" y="3803904"/>
+            <a:ext cx="2194560" cy="896112"/>
           </a:xfrm>
           <a:prstGeom prst="rect">
             <a:avLst/>
@@ -4588,27 +4568,7 @@
                 <a:ea typeface="メイリオ" pitchFamily="34" charset="-122"/>
                 <a:cs typeface="メイリオ" pitchFamily="34" charset="-120"/>
               </a:rPr>
-              <a:t>申し送り、</a:t>
-            </a:r>
-            <a:endParaRPr lang="ja-JP" sz="2200" dirty="0"/>
-          </a:p>
-          <a:p>
-            <a:pPr algn="ctr" indent="0" marL="0">
-              <a:spcAft>
-                <a:spcPts val="400"/>
-              </a:spcAft>
-              <a:buNone/>
-            </a:pPr>
-            <a:r>
-              <a:rPr lang="ja-JP" altLang="en-US" sz="2200" dirty="0">
-                <a:solidFill>
-                  <a:srgbClr val="262626"/>
-                </a:solidFill>
-                <a:latin typeface="メイリオ" pitchFamily="34" charset="0"/>
-                <a:ea typeface="メイリオ" pitchFamily="34" charset="-122"/>
-                <a:cs typeface="メイリオ" pitchFamily="34" charset="-120"/>
-              </a:rPr>
-              <a:t>記録</a:t>
+              <a:t>申し送り、記録</a:t>
             </a:r>
             <a:endParaRPr lang="ja-JP" sz="2200" dirty="0"/>
           </a:p>
@@ -5048,7 +5008,7 @@
                 <a:ea typeface="メイリオ" pitchFamily="34" charset="-122"/>
                 <a:cs typeface="メイリオ" pitchFamily="34" charset="-120"/>
               </a:rPr>
-              <a:t>日本麻酔科学会 周術期禁煙プラクティカルガイド / 日本麻酔科学会 悪性高熱症管理ガイドライン</a:t>
+              <a:t>日本麻酔科学会 周術期禁煙プラクティカルガイド（2021）・悪性高熱症管理ガイドライン（2025）</a:t>
             </a:r>
             <a:endParaRPr lang="ja-JP" sz="1600" dirty="0"/>
           </a:p>
@@ -5063,7 +5023,7 @@
         <p:spPr>
           <a:xfrm>
             <a:off x="502920" y="1755648"/>
-            <a:ext cx="11155680" cy="3968496"/>
+            <a:ext cx="11155680" cy="4096512"/>
           </a:xfrm>
           <a:prstGeom prst="rect">
             <a:avLst/>
@@ -5077,7 +5037,7 @@
           <a:p>
             <a:pPr algn="l" marL="406400" indent="-406400">
               <a:spcAft>
-                <a:spcPts val="1200"/>
+                <a:spcPts val="1400"/>
               </a:spcAft>
               <a:buSzPct val="100000"/>
               <a:buChar char="•"/>
@@ -5098,7 +5058,7 @@
           <a:p>
             <a:pPr algn="l" marL="406400" indent="-406400">
               <a:spcAft>
-                <a:spcPts val="1200"/>
+                <a:spcPts val="1400"/>
               </a:spcAft>
               <a:buSzPct val="100000"/>
               <a:buChar char="•"/>
@@ -5119,7 +5079,7 @@
           <a:p>
             <a:pPr algn="l" marL="406400" indent="-406400">
               <a:spcAft>
-                <a:spcPts val="1200"/>
+                <a:spcPts val="1400"/>
               </a:spcAft>
               <a:buSzPct val="100000"/>
               <a:buChar char="•"/>
@@ -5140,7 +5100,7 @@
           <a:p>
             <a:pPr algn="l" marL="406400" indent="-406400">
               <a:spcAft>
-                <a:spcPts val="1200"/>
+                <a:spcPts val="1400"/>
               </a:spcAft>
               <a:buSzPct val="100000"/>
               <a:buChar char="•"/>
@@ -5161,7 +5121,7 @@
           <a:p>
             <a:pPr algn="l" marL="406400" indent="-406400">
               <a:spcAft>
-                <a:spcPts val="1200"/>
+                <a:spcPts val="1400"/>
               </a:spcAft>
               <a:buSzPct val="100000"/>
               <a:buChar char="•"/>
@@ -5204,7 +5164,7 @@
           <a:p>
             <a:pPr algn="l" marL="406400" indent="-406400">
               <a:spcAft>
-                <a:spcPts val="1200"/>
+                <a:spcPts val="1400"/>
               </a:spcAft>
               <a:buSzPct val="100000"/>
               <a:buChar char="•"/>
@@ -6987,9 +6947,9 @@
             <a:tbl>
               <a:tblPr/>
               <a:tblGrid>
-                <a:gridCol w="786384"/>
-                <a:gridCol w="2660904"/>
-                <a:gridCol w="7708392"/>
+                <a:gridCol w="914400"/>
+                <a:gridCol w="2679192"/>
+                <a:gridCol w="7562088"/>
               </a:tblGrid>
               <a:tr h="411480">
                 <a:tc>
@@ -7799,7 +7759,7 @@
                           <a:ea typeface="メイリオ" pitchFamily="34" charset="-122"/>
                           <a:cs typeface="メイリオ" pitchFamily="34" charset="-120"/>
                         </a:rPr>
-                        <a:t>不良な糖尿病・高血圧、COPD、BMI 40 以上、</a:t>
+                        <a:t>不良な糖尿病・高血圧、BMI 40 以上、定期透析中、</a:t>
                       </a:r>
                       <a:endParaRPr lang="en-US" sz="2200" dirty="0">
                         <a:latin typeface="メイリオ" charset="0"/>
@@ -7823,7 +7783,7 @@
                           <a:ea typeface="メイリオ" pitchFamily="34" charset="-122"/>
                           <a:cs typeface="メイリオ" pitchFamily="34" charset="-120"/>
                         </a:rPr>
-                        <a:t>透析中、3 か月より前の心筋梗塞・脳卒中・ステント</a:t>
+                        <a:t>COPD、3 か月より前の心筋梗塞・脳卒中・ステント</a:t>
                       </a:r>
                       <a:endParaRPr lang="en-US" sz="2200" dirty="0">
                         <a:latin typeface="メイリオ" charset="0"/>
@@ -9078,7 +9038,7 @@
         <p:spPr>
           <a:xfrm>
             <a:off x="502920" y="1810512"/>
-            <a:ext cx="11155680" cy="3831336"/>
+            <a:ext cx="11155680" cy="4023360"/>
           </a:xfrm>
           <a:prstGeom prst="rect">
             <a:avLst/>
@@ -9092,7 +9052,7 @@
           <a:p>
             <a:pPr algn="l" marL="355600" indent="-355600">
               <a:spcAft>
-                <a:spcPts val="2800"/>
+                <a:spcPts val="3100"/>
               </a:spcAft>
               <a:buSzPct val="100000"/>
               <a:buChar char="•"/>
@@ -9124,7 +9084,7 @@
           <a:p>
             <a:pPr algn="l" marL="355600" indent="-355600">
               <a:spcAft>
-                <a:spcPts val="2800"/>
+                <a:spcPts val="3100"/>
               </a:spcAft>
               <a:buSzPct val="100000"/>
               <a:buChar char="•"/>
@@ -9145,7 +9105,7 @@
           <a:p>
             <a:pPr algn="l" marL="355600" indent="-355600">
               <a:spcAft>
-                <a:spcPts val="2800"/>
+                <a:spcPts val="3100"/>
               </a:spcAft>
               <a:buSzPct val="100000"/>
               <a:buChar char="•"/>
@@ -9166,7 +9126,7 @@
           <a:p>
             <a:pPr algn="l" marL="355600" indent="-355600">
               <a:spcAft>
-                <a:spcPts val="2800"/>
+                <a:spcPts val="3100"/>
               </a:spcAft>
               <a:buSzPct val="100000"/>
               <a:buChar char="•"/>
@@ -9231,7 +9191,7 @@
           <a:p>
             <a:pPr algn="l" marL="355600" indent="-355600">
               <a:spcAft>
-                <a:spcPts val="2800"/>
+                <a:spcPts val="3100"/>
               </a:spcAft>
               <a:buSzPct val="100000"/>
               <a:buChar char="•"/>
@@ -9700,7 +9660,7 @@
         <p:spPr>
           <a:xfrm>
             <a:off x="502920" y="1691640"/>
-            <a:ext cx="5358384" cy="4178808"/>
+            <a:ext cx="5481828" cy="4178808"/>
           </a:xfrm>
           <a:prstGeom prst="roundRect">
             <a:avLst>
@@ -9722,7 +9682,7 @@
         <p:spPr>
           <a:xfrm>
             <a:off x="640080" y="1828800"/>
-            <a:ext cx="5084064" cy="502920"/>
+            <a:ext cx="5326380" cy="502920"/>
           </a:xfrm>
           <a:prstGeom prst="rect">
             <a:avLst/>
@@ -9760,8 +9720,8 @@
         </p:nvSpPr>
         <p:spPr>
           <a:xfrm>
-            <a:off x="640080" y="2441448"/>
-            <a:ext cx="5084064" cy="3246120"/>
+            <a:off x="640080" y="2404872"/>
+            <a:ext cx="5326380" cy="3319272"/>
           </a:xfrm>
           <a:prstGeom prst="rect">
             <a:avLst/>
@@ -9775,7 +9735,7 @@
           <a:p>
             <a:pPr algn="l" marL="317500" indent="-317500">
               <a:spcAft>
-                <a:spcPts val="400"/>
+                <a:spcPts val="500"/>
               </a:spcAft>
               <a:buSzPct val="100000"/>
               <a:buChar char="•"/>
@@ -9796,7 +9756,7 @@
           <a:p>
             <a:pPr algn="l" marL="317500" indent="-317500">
               <a:spcAft>
-                <a:spcPts val="400"/>
+                <a:spcPts val="500"/>
               </a:spcAft>
               <a:buSzPct val="100000"/>
               <a:buChar char="•"/>
@@ -9817,7 +9777,7 @@
           <a:p>
             <a:pPr algn="l" marL="317500" indent="-317500">
               <a:spcAft>
-                <a:spcPts val="400"/>
+                <a:spcPts val="500"/>
               </a:spcAft>
               <a:buSzPct val="100000"/>
               <a:buChar char="•"/>
@@ -9838,7 +9798,7 @@
           <a:p>
             <a:pPr algn="l" marL="317500" indent="-317500">
               <a:spcAft>
-                <a:spcPts val="400"/>
+                <a:spcPts val="500"/>
               </a:spcAft>
               <a:buSzPct val="100000"/>
               <a:buChar char="•"/>
@@ -9859,7 +9819,7 @@
           <a:p>
             <a:pPr algn="l" marL="317500" indent="-317500">
               <a:spcAft>
-                <a:spcPts val="400"/>
+                <a:spcPts val="500"/>
               </a:spcAft>
               <a:buSzPct val="100000"/>
               <a:buChar char="•"/>
@@ -9880,7 +9840,7 @@
           <a:p>
             <a:pPr algn="l" marL="317500" indent="-317500">
               <a:spcAft>
-                <a:spcPts val="400"/>
+                <a:spcPts val="500"/>
               </a:spcAft>
               <a:buSzPct val="100000"/>
               <a:buChar char="•"/>
@@ -9901,7 +9861,7 @@
           <a:p>
             <a:pPr algn="l" marL="317500" indent="-317500">
               <a:spcAft>
-                <a:spcPts val="400"/>
+                <a:spcPts val="500"/>
               </a:spcAft>
               <a:buSzPct val="100000"/>
               <a:buChar char="•"/>
@@ -9929,8 +9889,8 @@
         </p:nvSpPr>
         <p:spPr>
           <a:xfrm>
-            <a:off x="6080760" y="1691640"/>
-            <a:ext cx="5605272" cy="4178808"/>
+            <a:off x="6204204" y="1691640"/>
+            <a:ext cx="5481828" cy="4178808"/>
           </a:xfrm>
           <a:prstGeom prst="roundRect">
             <a:avLst>
@@ -9951,8 +9911,8 @@
         </p:nvSpPr>
         <p:spPr>
           <a:xfrm>
-            <a:off x="6217920" y="1828800"/>
-            <a:ext cx="5330952" cy="502920"/>
+            <a:off x="6341364" y="1828800"/>
+            <a:ext cx="5326380" cy="502920"/>
           </a:xfrm>
           <a:prstGeom prst="rect">
             <a:avLst/>
@@ -9990,8 +9950,8 @@
         </p:nvSpPr>
         <p:spPr>
           <a:xfrm>
-            <a:off x="6217920" y="2441448"/>
-            <a:ext cx="5330952" cy="2999232"/>
+            <a:off x="6341364" y="2404872"/>
+            <a:ext cx="5326380" cy="1874520"/>
           </a:xfrm>
           <a:prstGeom prst="rect">
             <a:avLst/>
@@ -10005,7 +9965,7 @@
           <a:p>
             <a:pPr algn="l" marL="317500" indent="-317500">
               <a:spcAft>
-                <a:spcPts val="3000"/>
+                <a:spcPts val="500"/>
               </a:spcAft>
               <a:buSzPct val="100000"/>
               <a:buChar char="•"/>
@@ -10026,7 +9986,7 @@
           <a:p>
             <a:pPr algn="l" marL="317500" indent="-317500">
               <a:spcAft>
-                <a:spcPts val="3000"/>
+                <a:spcPts val="500"/>
               </a:spcAft>
               <a:buSzPct val="100000"/>
               <a:buChar char="•"/>
@@ -10047,7 +10007,7 @@
           <a:p>
             <a:pPr algn="l" marL="317500" indent="-317500">
               <a:spcAft>
-                <a:spcPts val="3000"/>
+                <a:spcPts val="500"/>
               </a:spcAft>
               <a:buSzPct val="100000"/>
               <a:buChar char="•"/>
@@ -10068,7 +10028,7 @@
           <a:p>
             <a:pPr algn="l" marL="317500" indent="-317500">
               <a:spcAft>
-                <a:spcPts val="3000"/>
+                <a:spcPts val="500"/>
               </a:spcAft>
               <a:buSzPct val="100000"/>
               <a:buChar char="•"/>
